--- a/docs/brand/guidelines/fikirtive-brand-guidelines-v4.pptx
+++ b/docs/brand/guidelines/fikirtive-brand-guidelines-v4.pptx
@@ -4732,7 +4732,7 @@
                 <a:ea typeface="Geist" pitchFamily="34" charset="-122"/>
                 <a:cs typeface="Geist" pitchFamily="34" charset="-120"/>
               </a:rPr>
-              <a:t>Text on neutrals: ink for primary, Ink 2 for secondary, Ink 3 for captions. Text on semantic fills: white. Ink as a full-bleed ground: covers and closing surfaces only. Digital-first palette — hex is the source of truth; print matching is defined when print work is commissioned.</a:t>
+              <a:t>Text on neutrals: Ink for primary, Ink 2 for secondary, Ink 3 for captions. Text on semantic fills: white, for bold labels and badges. Ink as a full-bleed ground: covers and closing surfaces only. Digital-first palette: hex is the source of truth; print matching is defined when print work is commissioned.</a:t>
             </a:r>
             <a:endParaRPr lang="en-US" sz="900" dirty="0"/>
           </a:p>
@@ -5304,7 +5304,7 @@
                 <a:ea typeface="JetBrains Mono" pitchFamily="34" charset="-122"/>
                 <a:cs typeface="JetBrains Mono" pitchFamily="34" charset="-120"/>
               </a:rPr>
-              <a:t>#E0F2FE – #EDE9FE · text #2E4A66</a:t>
+              <a:t>#E0F2FE – #BAE6FD · text #2E4A66</a:t>
             </a:r>
             <a:endParaRPr lang="en-US" sz="750" dirty="0"/>
           </a:p>
@@ -6221,7 +6221,7 @@
                 <a:ea typeface="Geist" pitchFamily="34" charset="-122"/>
                 <a:cs typeface="Geist" pitchFamily="34" charset="-120"/>
               </a:rPr>
-              <a:t>Accent tiles on content only — rules in 03 · Color palette.</a:t>
+              <a:t>Accent tiles on content only; rules in 03 · Color palette.</a:t>
             </a:r>
             <a:endParaRPr lang="en-US" sz="1050" dirty="0"/>
           </a:p>
@@ -6261,24 +6261,52 @@
           </a:effectLst>
         </p:spPr>
       </p:sp>
+      <p:sp>
+        <p:nvSpPr>
+          <p:cNvPr id="17" name="Shape 15"/>
+          <p:cNvSpPr/>
+          <p:nvPr/>
+        </p:nvSpPr>
+        <p:spPr>
+          <a:xfrm>
+            <a:off x="7287768" y="1892808"/>
+            <a:ext cx="1784452" cy="1197864"/>
+          </a:xfrm>
+          <a:prstGeom prst="roundRect">
+            <a:avLst>
+              <a:gd name="adj" fmla="val 3817"/>
+            </a:avLst>
+          </a:prstGeom>
+          <a:solidFill>
+            <a:srgbClr val="F5F1E8"/>
+          </a:solidFill>
+          <a:ln/>
+        </p:spPr>
+      </p:sp>
       <p:pic>
         <p:nvPicPr>
-          <p:cNvPr id="17" name="Image 0" descr="/private/tmp/claude-501/-Users-winnin-Desktop-FIKIRTIVE--claude-worktrees-orchestration-dashboard-design-e914f4/43c820ca-6072-40d4-9469-97e85bbeded7/scratchpad/deck-assets/grad-peach-sq.png">    </p:cNvPr>
+          <p:cNvPr id="18" name="Image 0" descr="/private/tmp/claude-501/-Users-winnin-Desktop-FIKIRTIVE--claude-worktrees-orchestration-dashboard-design-e914f4/43c820ca-6072-40d4-9469-97e85bbeded7/scratchpad/deck-assets/otto-idle.svg">    </p:cNvPr>
           <p:cNvPicPr>
             <a:picLocks noChangeAspect="1"/>
           </p:cNvPicPr>
           <p:nvPr/>
         </p:nvPicPr>
         <p:blipFill>
-          <a:blip r:embed="rId1"/>
+          <a:blip r:embed="rId1">
+            <a:extLst>
+              <a:ext uri="{96DAC541-7B7A-43D3-8B79-37D633B846F1}">
+                <asvg:svgBlip xmlns:asvg="http://schemas.microsoft.com/office/drawing/2016/SVG/main" r:embed="rId2"/>
+              </a:ext>
+            </a:extLst>
+          </a:blip>
           <a:stretch>
             <a:fillRect/>
           </a:stretch>
         </p:blipFill>
         <p:spPr>
           <a:xfrm>
-            <a:off x="7287768" y="1892808"/>
-            <a:ext cx="1784452" cy="1197864"/>
+            <a:off x="7777658" y="2125980"/>
+            <a:ext cx="804672" cy="731520"/>
           </a:xfrm>
           <a:prstGeom prst="rect">
             <a:avLst/>
@@ -6287,7 +6315,7 @@
       </p:pic>
       <p:sp>
         <p:nvSpPr>
-          <p:cNvPr id="18" name="Text 15"/>
+          <p:cNvPr id="19" name="Text 16"/>
           <p:cNvSpPr/>
           <p:nvPr/>
         </p:nvSpPr>
@@ -6326,14 +6354,14 @@
       </p:sp>
       <p:pic>
         <p:nvPicPr>
-          <p:cNvPr id="19" name="Image 1" descr="/private/tmp/claude-501/-Users-winnin-Desktop-FIKIRTIVE--claude-worktrees-orchestration-dashboard-design-e914f4/43c820ca-6072-40d4-9469-97e85bbeded7/scratchpad/deck-assets/dotgrid.png">    </p:cNvPr>
+          <p:cNvPr id="20" name="Image 1" descr="/private/tmp/claude-501/-Users-winnin-Desktop-FIKIRTIVE--claude-worktrees-orchestration-dashboard-design-e914f4/43c820ca-6072-40d4-9469-97e85bbeded7/scratchpad/deck-assets/dotgrid.png">    </p:cNvPr>
           <p:cNvPicPr>
             <a:picLocks noChangeAspect="1"/>
           </p:cNvPicPr>
           <p:nvPr/>
         </p:nvPicPr>
         <p:blipFill>
-          <a:blip r:embed="rId2"/>
+          <a:blip r:embed="rId3"/>
           <a:stretch>
             <a:fillRect/>
           </a:stretch>
@@ -6350,7 +6378,7 @@
       </p:pic>
       <p:sp>
         <p:nvSpPr>
-          <p:cNvPr id="20" name="Text 16"/>
+          <p:cNvPr id="21" name="Text 17"/>
           <p:cNvSpPr/>
           <p:nvPr/>
         </p:nvSpPr>
@@ -6389,7 +6417,7 @@
       </p:sp>
       <p:sp>
         <p:nvSpPr>
-          <p:cNvPr id="21" name="Shape 17"/>
+          <p:cNvPr id="22" name="Shape 18"/>
           <p:cNvSpPr/>
           <p:nvPr/>
         </p:nvSpPr>
@@ -6416,17 +6444,17 @@
       </p:sp>
       <p:pic>
         <p:nvPicPr>
-          <p:cNvPr id="22" name="Image 2" descr="/private/tmp/claude-501/-Users-winnin-Desktop-FIKIRTIVE--claude-worktrees-orchestration-dashboard-design-e914f4/43c820ca-6072-40d4-9469-97e85bbeded7/scratchpad/deck-assets/ic-cal.svg">    </p:cNvPr>
+          <p:cNvPr id="23" name="Image 2" descr="/private/tmp/claude-501/-Users-winnin-Desktop-FIKIRTIVE--claude-worktrees-orchestration-dashboard-design-e914f4/43c820ca-6072-40d4-9469-97e85bbeded7/scratchpad/deck-assets/ic-cal.svg">    </p:cNvPr>
           <p:cNvPicPr>
             <a:picLocks noChangeAspect="1"/>
           </p:cNvPicPr>
           <p:nvPr/>
         </p:nvPicPr>
         <p:blipFill>
-          <a:blip r:embed="rId3">
+          <a:blip r:embed="rId4">
             <a:extLst>
               <a:ext uri="{96DAC541-7B7A-43D3-8B79-37D633B846F1}">
-                <asvg:svgBlip xmlns:asvg="http://schemas.microsoft.com/office/drawing/2016/SVG/main" r:embed="rId4"/>
+                <asvg:svgBlip xmlns:asvg="http://schemas.microsoft.com/office/drawing/2016/SVG/main" r:embed="rId5"/>
               </a:ext>
             </a:extLst>
           </a:blip>
@@ -6446,17 +6474,17 @@
       </p:pic>
       <p:pic>
         <p:nvPicPr>
-          <p:cNvPr id="23" name="Image 3" descr="/private/tmp/claude-501/-Users-winnin-Desktop-FIKIRTIVE--claude-worktrees-orchestration-dashboard-design-e914f4/43c820ca-6072-40d4-9469-97e85bbeded7/scratchpad/deck-assets/ic-img.svg">    </p:cNvPr>
+          <p:cNvPr id="24" name="Image 3" descr="/private/tmp/claude-501/-Users-winnin-Desktop-FIKIRTIVE--claude-worktrees-orchestration-dashboard-design-e914f4/43c820ca-6072-40d4-9469-97e85bbeded7/scratchpad/deck-assets/ic-img.svg">    </p:cNvPr>
           <p:cNvPicPr>
             <a:picLocks noChangeAspect="1"/>
           </p:cNvPicPr>
           <p:nvPr/>
         </p:nvPicPr>
         <p:blipFill>
-          <a:blip r:embed="rId5">
+          <a:blip r:embed="rId6">
             <a:extLst>
               <a:ext uri="{96DAC541-7B7A-43D3-8B79-37D633B846F1}">
-                <asvg:svgBlip xmlns:asvg="http://schemas.microsoft.com/office/drawing/2016/SVG/main" r:embed="rId6"/>
+                <asvg:svgBlip xmlns:asvg="http://schemas.microsoft.com/office/drawing/2016/SVG/main" r:embed="rId7"/>
               </a:ext>
             </a:extLst>
           </a:blip>
@@ -6476,17 +6504,17 @@
       </p:pic>
       <p:pic>
         <p:nvPicPr>
-          <p:cNvPr id="24" name="Image 4" descr="/private/tmp/claude-501/-Users-winnin-Desktop-FIKIRTIVE--claude-worktrees-orchestration-dashboard-design-e914f4/43c820ca-6072-40d4-9469-97e85bbeded7/scratchpad/deck-assets/ic-chart.svg">    </p:cNvPr>
+          <p:cNvPr id="25" name="Image 4" descr="/private/tmp/claude-501/-Users-winnin-Desktop-FIKIRTIVE--claude-worktrees-orchestration-dashboard-design-e914f4/43c820ca-6072-40d4-9469-97e85bbeded7/scratchpad/deck-assets/ic-chart.svg">    </p:cNvPr>
           <p:cNvPicPr>
             <a:picLocks noChangeAspect="1"/>
           </p:cNvPicPr>
           <p:nvPr/>
         </p:nvPicPr>
         <p:blipFill>
-          <a:blip r:embed="rId7">
+          <a:blip r:embed="rId8">
             <a:extLst>
               <a:ext uri="{96DAC541-7B7A-43D3-8B79-37D633B846F1}">
-                <asvg:svgBlip xmlns:asvg="http://schemas.microsoft.com/office/drawing/2016/SVG/main" r:embed="rId8"/>
+                <asvg:svgBlip xmlns:asvg="http://schemas.microsoft.com/office/drawing/2016/SVG/main" r:embed="rId9"/>
               </a:ext>
             </a:extLst>
           </a:blip>
@@ -6506,7 +6534,7 @@
       </p:pic>
       <p:sp>
         <p:nvSpPr>
-          <p:cNvPr id="25" name="Text 18"/>
+          <p:cNvPr id="26" name="Text 19"/>
           <p:cNvSpPr/>
           <p:nvPr/>
         </p:nvSpPr>
@@ -6545,14 +6573,14 @@
       </p:sp>
       <p:pic>
         <p:nvPicPr>
-          <p:cNvPr id="26" name="Image 5" descr="/private/tmp/claude-501/-Users-winnin-Desktop-FIKIRTIVE--claude-worktrees-orchestration-dashboard-design-e914f4/43c820ca-6072-40d4-9469-97e85bbeded7/scratchpad/deck-assets/grad-sky.png">    </p:cNvPr>
+          <p:cNvPr id="27" name="Image 5" descr="/private/tmp/claude-501/-Users-winnin-Desktop-FIKIRTIVE--claude-worktrees-orchestration-dashboard-design-e914f4/43c820ca-6072-40d4-9469-97e85bbeded7/scratchpad/deck-assets/grad-sky.png">    </p:cNvPr>
           <p:cNvPicPr>
             <a:picLocks noChangeAspect="1"/>
           </p:cNvPicPr>
           <p:nvPr/>
         </p:nvPicPr>
         <p:blipFill>
-          <a:blip r:embed="rId9"/>
+          <a:blip r:embed="rId10"/>
           <a:stretch>
             <a:fillRect/>
           </a:stretch>
@@ -6569,7 +6597,7 @@
       </p:pic>
       <p:sp>
         <p:nvSpPr>
-          <p:cNvPr id="27" name="Text 19"/>
+          <p:cNvPr id="28" name="Text 20"/>
           <p:cNvSpPr/>
           <p:nvPr/>
         </p:nvSpPr>
@@ -6608,7 +6636,7 @@
       </p:sp>
       <p:sp>
         <p:nvSpPr>
-          <p:cNvPr id="28" name="Text 20"/>
+          <p:cNvPr id="29" name="Text 21"/>
           <p:cNvSpPr/>
           <p:nvPr/>
         </p:nvSpPr>
@@ -6830,7 +6858,7 @@
                 <a:ea typeface="Geist" pitchFamily="34" charset="-122"/>
                 <a:cs typeface="Geist" pitchFamily="34" charset="-120"/>
               </a:rPr>
-              <a:t>They run the store and the marketing alone — no team and no time to learn prompting. They need plans they can read, costs shown before anything runs, and a record of everything that happened.</a:t>
+              <a:t>They run the store and the marketing alone: no team, and no time to learn prompting. They need plans they can read, costs shown before anything runs, and a record of everything that happened.</a:t>
             </a:r>
             <a:endParaRPr lang="en-US" sz="1200" dirty="0"/>
           </a:p>
@@ -6859,7 +6887,7 @@
                 <a:ea typeface="Geist" pitchFamily="34" charset="-122"/>
                 <a:cs typeface="Geist" pitchFamily="34" charset="-120"/>
               </a:rPr>
-              <a:t>Global by default. Southeast Asia is the first market, not the frame of reference. Anything involving money is specific: amounts, counts, dates.</a:t>
+              <a:t>Global by default. Southeast Asia is the first market; copy never assumes it. Anything involving money is specific: amounts, counts, dates.</a:t>
             </a:r>
             <a:endParaRPr lang="en-US" sz="1200" dirty="0"/>
           </a:p>
@@ -7079,7 +7107,7 @@
                 <a:ea typeface="Geist" pitchFamily="34" charset="-122"/>
                 <a:cs typeface="Geist" pitchFamily="34" charset="-120"/>
               </a:rPr>
-              <a:t>Two voices. The product is neutral and precise. Otto speaks plainly, in the first person. Both are honest about cost and status — serious about spending, calm about failure.</a:t>
+              <a:t>Two voices. The product is neutral and precise. Otto speaks plainly, in the first person. Both are honest about cost and status: serious about spending, calm about failure.</a:t>
             </a:r>
             <a:endParaRPr lang="en-US" sz="1050" dirty="0"/>
           </a:p>
@@ -7856,7 +7884,7 @@
                 <a:ea typeface="Geist" pitchFamily="34" charset="-122"/>
                 <a:cs typeface="Geist" pitchFamily="34" charset="-120"/>
               </a:rPr>
-              <a:t>Making 4 images for “Raya promo” — 2 are done.</a:t>
+              <a:t>I’m making 4 images for “Raya promo” — 2 are done.</a:t>
             </a:r>
             <a:endParaRPr lang="en-US" sz="1050" dirty="0"/>
           </a:p>
@@ -8998,7 +9026,7 @@
                 <a:ea typeface="Geist" pitchFamily="34" charset="-122"/>
                 <a:cs typeface="Geist" pitchFamily="34" charset="-120"/>
               </a:rPr>
-              <a:t>Geist 750, -2.8% tracking, always with the period.</a:t>
+              <a:t>Geist, weight 750, -2.8% tracking, always with the period.</a:t>
             </a:r>
             <a:endParaRPr lang="en-US" sz="1050" dirty="0"/>
           </a:p>
@@ -9571,7 +9599,7 @@
                 <a:ea typeface="Geist" pitchFamily="34" charset="-122"/>
                 <a:cs typeface="Geist" pitchFamily="34" charset="-120"/>
               </a:rPr>
-              <a:t>FIKIRTIVE BRAND GUIDELINES</a:t>
+              <a:t>BRAND GUIDELINES</a:t>
             </a:r>
             <a:endParaRPr lang="en-US" sz="950" dirty="0"/>
           </a:p>
@@ -11327,7 +11355,7 @@
             </a:avLst>
           </a:prstGeom>
           <a:solidFill>
-            <a:srgbClr val="EC5828"/>
+            <a:srgbClr val="5B5F6C"/>
           </a:solidFill>
           <a:ln/>
         </p:spPr>
@@ -11398,7 +11426,7 @@
                 <a:ea typeface="Geist" pitchFamily="34" charset="-122"/>
                 <a:cs typeface="Geist" pitchFamily="34" charset="-120"/>
               </a:rPr>
-              <a:t>White — on coral or photography</a:t>
+              <a:t>White — on photography</a:t>
             </a:r>
             <a:endParaRPr lang="en-US" sz="850" dirty="0"/>
           </a:p>
@@ -11807,7 +11835,7 @@
                 <a:ea typeface="Geist" pitchFamily="34" charset="-122"/>
                 <a:cs typeface="Geist" pitchFamily="34" charset="-120"/>
               </a:rPr>
-              <a:t>Tile corner radius: 22.5% of the side. All tiles carry the paper mark.</a:t>
+              <a:t>Tile corner radius: 22.5% of the side; the app icon is rounder for OS icon grids. All tiles carry the paper mark.</a:t>
             </a:r>
             <a:endParaRPr lang="en-US" sz="850" dirty="0"/>
           </a:p>
@@ -12549,7 +12577,7 @@
                 <a:ea typeface="Geist" pitchFamily="34" charset="-122"/>
                 <a:cs typeface="Geist" pitchFamily="34" charset="-120"/>
               </a:rPr>
-              <a:t>Browser tabs and app icons: coral tile. Formal documents: black tile. On color or photography: paper or ink mark, inside a tile.</a:t>
+              <a:t>Browser tabs and app icons: coral tile. Formal documents: black tile. On color: paper or ink mark, inside a tile. On photography: the white mark.</a:t>
             </a:r>
             <a:endParaRPr lang="en-US" sz="1050" dirty="0"/>
           </a:p>
@@ -14101,7 +14129,7 @@
                 <a:ea typeface="Geist" pitchFamily="34" charset="-122"/>
                 <a:cs typeface="Geist" pitchFamily="34" charset="-120"/>
               </a:rPr>
-              <a:t>Geist, weight 750, -3% tracking, always lowercase. Never re-typeset from another face — use the master asset.</a:t>
+              <a:t>Geist, weight 750, -3% tracking, always lowercase. Never re-typeset from another face; use the master asset.</a:t>
             </a:r>
             <a:endParaRPr lang="en-US" sz="1050" dirty="0"/>
           </a:p>
@@ -14888,7 +14916,7 @@
                 <a:ea typeface="Geist" pitchFamily="34" charset="-122"/>
                 <a:cs typeface="Geist" pitchFamily="34" charset="-120"/>
               </a:rPr>
-              <a:t>Marks Otto’s own activity — never decorative.</a:t>
+              <a:t>Marks Otto’s own activity. Never decorative.</a:t>
             </a:r>
             <a:endParaRPr lang="en-US" sz="1050" dirty="0"/>
           </a:p>
@@ -14969,7 +14997,7 @@
                 <a:ea typeface="Geist" pitchFamily="34" charset="-122"/>
                 <a:cs typeface="Geist" pitchFamily="34" charset="-120"/>
               </a:rPr>
-              <a:t>One quarter of the cloud’s height. Never locked up with the F mark — the two marks never form one unit.</a:t>
+              <a:t>One quarter of the cloud’s height. Never locked up with the F mark; the two marks never form one unit.</a:t>
             </a:r>
             <a:endParaRPr lang="en-US" sz="1050" dirty="0"/>
           </a:p>
@@ -16381,7 +16409,7 @@
                 <a:ea typeface="Geist" pitchFamily="34" charset="-122"/>
                 <a:cs typeface="Geist" pitchFamily="34" charset="-120"/>
               </a:rPr>
-              <a:t>Approving</a:t>
+              <a:t>Approved</a:t>
             </a:r>
             <a:endParaRPr lang="en-US" sz="950" dirty="0"/>
           </a:p>
@@ -16423,7 +16451,7 @@
                 <a:ea typeface="Geist" pitchFamily="34" charset="-122"/>
                 <a:cs typeface="Geist" pitchFamily="34" charset="-120"/>
               </a:rPr>
-              <a:t>Approved — the action is running</a:t>
+              <a:t>Approved and running</a:t>
             </a:r>
             <a:endParaRPr lang="en-US" sz="800" dirty="0"/>
           </a:p>

--- a/docs/brand/guidelines/fikirtive-brand-guidelines-v4.pptx
+++ b/docs/brand/guidelines/fikirtive-brand-guidelines-v4.pptx
@@ -9296,7 +9296,7 @@
                 <a:ea typeface="Geist" pitchFamily="34" charset="-122"/>
                 <a:cs typeface="Geist" pitchFamily="34" charset="-120"/>
               </a:rPr>
-              <a:t>Fikirtive is the all-in-one marketing OS for small businesses. It gives merchants complete, hands-on marketing tools — creation, campaigns, scheduling, and publishing — plus Otto, an AI marketing operator that researches, plans, and executes with the merchant’s approval. Every action is transparent: merchants see what things cost before they run, and everything leaves a trail they can read. Fikirtive is operated by BELCORT SDN BHD.</a:t>
+              <a:t>Fikirtive is the marketing OS for small businesses. Merchants get the full toolset — creation, campaigns, scheduling, and publishing — plus Otto, an AI marketing operator that researches, plans, and executes with the merchant’s approval. Merchants see the cost of every action before it runs, and every action leaves a readable record. Fikirtive is a product of BELCORT SDN BHD.</a:t>
             </a:r>
             <a:endParaRPr lang="en-US" sz="1000" dirty="0"/>
           </a:p>
